--- a/docs/main_figure_revision_20260920/Main_Figure_Editable_Final_20260925.pptx
+++ b/docs/main_figure_revision_20260920/Main_Figure_Editable_Final_20260925.pptx
@@ -2,13 +2,13 @@
 <file path=ppt/presentation.xml><?xml version="1.0" encoding="utf-8"?>
 <p:presentation xmlns:p="http://schemas.openxmlformats.org/presentationml/2006/main">
   <p:sldMasterIdLst>
-    <p:sldMasterId xmlns:r="http://schemas.openxmlformats.org/officeDocument/2006/relationships" id="2147483648" r:id="Rd617e14eb6314967"/>
+    <p:sldMasterId xmlns:r="http://schemas.openxmlformats.org/officeDocument/2006/relationships" id="2147483648" r:id="Ra585aee557c84b6d"/>
   </p:sldMasterIdLst>
   <p:notesMasterIdLst>
-    <p:notesMasterId xmlns:r="http://schemas.openxmlformats.org/officeDocument/2006/relationships" r:id="Rbce48c6baf97412e"/>
+    <p:notesMasterId xmlns:r="http://schemas.openxmlformats.org/officeDocument/2006/relationships" r:id="R21ebbce6716544d6"/>
   </p:notesMasterIdLst>
   <p:sldIdLst>
-    <p:sldId xmlns:r="http://schemas.openxmlformats.org/officeDocument/2006/relationships" id="256" r:id="Rdb5128414abc47cc"/>
+    <p:sldId xmlns:r="http://schemas.openxmlformats.org/officeDocument/2006/relationships" id="256" r:id="Rcd0c5581f5294c28"/>
   </p:sldIdLst>
   <p:sldSz cx="12192000" cy="10096500"/>
   <p:notesSz cx="6858000" cy="9144000"/>
@@ -442,7 +442,7 @@
           <a:lstStyle xmlns:a="http://schemas.openxmlformats.org/drawingml/2006/main"/>
           <a:p xmlns:a="http://schemas.openxmlformats.org/drawingml/2006/main">
             <a:r>
-              <a:t>Scientific sources: scripts/manuscript_build_20260914 and docs/manuscript_polished_20260919. Real image assets: D:\STUDY\My_github\reference-matching-interaction-ad\scripts\figures_reference_matching_20260914\assets. MPDD metal_plate/test/scratches/026.png, A1 joint matching, seed 0 K=1. Score map follows stored resize and Gaussian sigma=4 processing. Red contour uses archived 256-bin Otsu polygons without loading a test mask. Three support thumbnails illustrate the general K-image input; they do not claim the output example used all three. A1, DUP, TRI, and BAL denote Dual-encoder baseline, Duplicate-branch control, Equal-weight replacement, and Balanced replacement. The frozen encoder names are DINOv2-B/14, AnomalyCLIP visual, and the replacement options DINOv2-S/14 or WideResNet50-2. p is query-patch index, b branch index, r normal-bank candidate. Native model outputs are the continuous anomaly map and its spatial maximum. Contour is display only. The replacement slot is a fixed construction, never a runtime switch. All diagrams and labels are editable native shapes, with real images embedded.</a:t>
+              <a:t>Scientific sources: scripts/manuscript_build_20260914 and docs/manuscript_polished_20260919. Real image assets: D:\STUDY\My_github\reference-matching-interaction-ad\scripts\figures_reference_matching_20260914\assets. MPDD metal_plate/test/scratches/026.png, A1 joint matching, seed 0 K=1. Score map follows stored resize and Gaussian sigma=4 processing. Red contour uses archived 256-bin Otsu polygons without loading a test mask. Three support thumbnails illustrate the general K-image input; they do not claim the output example used all three. The four constructions are the dual-encoder baseline, duplicate-branch control, equal-weight replacement, and balanced replacement. The frozen encoder names are DINOv2-B/14, AnomalyCLIP visual, and the replacement options DINOv2-S/14 or WideResNet50-2. p is query-patch index, b branch index, r normal-bank candidate. Native model outputs are the continuous anomaly map and its spatial maximum. Contour is display only. The replacement slot is a fixed construction, never a runtime switch. All diagrams and labels are editable native shapes, with real images embedded.</a:t>
             </a:r>
           </a:p>
         </p:txBody>
@@ -510,7 +510,7 @@
   </p:cSld>
   <p:clrMap bg1="lt1" tx1="dk1" bg2="lt2" tx2="dk2" accent1="accent1" accent2="accent2" accent3="accent3" accent4="accent4" accent5="accent5" accent6="accent6" hlink="hlink" folHlink="folHlink"/>
   <p:sldLayoutIdLst>
-    <p:sldLayoutId xmlns:r="http://schemas.openxmlformats.org/officeDocument/2006/relationships" id="2147483649" r:id="R0d20abd1326d44ca"/>
+    <p:sldLayoutId xmlns:r="http://schemas.openxmlformats.org/officeDocument/2006/relationships" id="2147483649" r:id="R1395b844a1834453"/>
   </p:sldLayoutIdLst>
   <p:txStyles>
     <p:titleStyle>
@@ -1061,7 +1061,7 @@
           <p:cNvPr id="139" name="memory-band">
             <a:extLst xmlns:a="http://schemas.openxmlformats.org/drawingml/2006/main">
               <a:ext uri="{FF2B5EF4-FFF2-40B4-BE49-F238E27FC236}">
-                <a16:creationId xmlns:a16="http://schemas.microsoft.com/office/drawing/2014/main" id="{EA7CFDBC-EB53-4BD9-A743-097CB45862F2}"/>
+                <a16:creationId xmlns:a16="http://schemas.microsoft.com/office/drawing/2014/main" id="{DB5B9EA5-F7DF-4060-9D9B-F2F8816C1399}"/>
               </a:ext>
             </a:extLst>
           </p:cNvPr>
@@ -1092,7 +1092,7 @@
           <p:cNvPr id="2" name="query-band">
             <a:extLst xmlns:a="http://schemas.openxmlformats.org/drawingml/2006/main">
               <a:ext uri="{FF2B5EF4-FFF2-40B4-BE49-F238E27FC236}">
-                <a16:creationId xmlns:a16="http://schemas.microsoft.com/office/drawing/2014/main" id="{6FA39FEC-9C46-424A-8A25-4811ACDFF6CD}"/>
+                <a16:creationId xmlns:a16="http://schemas.microsoft.com/office/drawing/2014/main" id="{81A9188B-6BA3-44B7-8095-918BA9F13A4F}"/>
               </a:ext>
             </a:extLst>
           </p:cNvPr>
@@ -1123,7 +1123,7 @@
           <p:cNvPr id="3" name="control-band">
             <a:extLst xmlns:a="http://schemas.openxmlformats.org/drawingml/2006/main">
               <a:ext uri="{FF2B5EF4-FFF2-40B4-BE49-F238E27FC236}">
-                <a16:creationId xmlns:a16="http://schemas.microsoft.com/office/drawing/2014/main" id="{038A3FE1-681D-4CE5-B7CE-BBF8FA260613}"/>
+                <a16:creationId xmlns:a16="http://schemas.microsoft.com/office/drawing/2014/main" id="{B4A0CD0E-632B-4889-8A48-BF72ACBD055A}"/>
               </a:ext>
             </a:extLst>
           </p:cNvPr>
@@ -1154,7 +1154,7 @@
           <p:cNvPr id="4" name="section-a">
             <a:extLst xmlns:a="http://schemas.openxmlformats.org/drawingml/2006/main">
               <a:ext uri="{FF2B5EF4-FFF2-40B4-BE49-F238E27FC236}">
-                <a16:creationId xmlns:a16="http://schemas.microsoft.com/office/drawing/2014/main" id="{CAD9B1DA-9821-4225-96D1-1F3337EA7804}"/>
+                <a16:creationId xmlns:a16="http://schemas.microsoft.com/office/drawing/2014/main" id="{468119D4-233C-4359-BA44-0E9D1204B2BE}"/>
               </a:ext>
             </a:extLst>
           </p:cNvPr>
@@ -1220,7 +1220,7 @@
           <p:nvPr/>
         </p:nvPicPr>
         <p:blipFill>
-          <a:blip xmlns:r="http://schemas.openxmlformats.org/officeDocument/2006/relationships" xmlns:a="http://schemas.openxmlformats.org/drawingml/2006/main" r:embed="Rc3597c27cd2746c1"/>
+          <a:blip xmlns:r="http://schemas.openxmlformats.org/officeDocument/2006/relationships" xmlns:a="http://schemas.openxmlformats.org/drawingml/2006/main" r:embed="Rb387ba49410d4f07"/>
           <a:stretch xmlns:a="http://schemas.openxmlformats.org/drawingml/2006/main"/>
         </p:blipFill>
         <p:spPr>
@@ -1238,7 +1238,7 @@
           <p:cNvPr id="6" name="support-border-0">
             <a:extLst xmlns:a="http://schemas.openxmlformats.org/drawingml/2006/main">
               <a:ext uri="{FF2B5EF4-FFF2-40B4-BE49-F238E27FC236}">
-                <a16:creationId xmlns:a16="http://schemas.microsoft.com/office/drawing/2014/main" id="{F4C6511D-CC68-4803-AF29-94A4D1492B46}"/>
+                <a16:creationId xmlns:a16="http://schemas.microsoft.com/office/drawing/2014/main" id="{23B2D91B-B393-4C1E-9EBC-A2F4B3BE7DEA}"/>
               </a:ext>
             </a:extLst>
           </p:cNvPr>
@@ -1273,7 +1273,7 @@
           <p:nvPr/>
         </p:nvPicPr>
         <p:blipFill>
-          <a:blip xmlns:r="http://schemas.openxmlformats.org/officeDocument/2006/relationships" xmlns:a="http://schemas.openxmlformats.org/drawingml/2006/main" r:embed="R34cf2e6e66bf408f"/>
+          <a:blip xmlns:r="http://schemas.openxmlformats.org/officeDocument/2006/relationships" xmlns:a="http://schemas.openxmlformats.org/drawingml/2006/main" r:embed="Re4c446af887d4f59"/>
           <a:stretch xmlns:a="http://schemas.openxmlformats.org/drawingml/2006/main"/>
         </p:blipFill>
         <p:spPr>
@@ -1291,7 +1291,7 @@
           <p:cNvPr id="8" name="support-border-1">
             <a:extLst xmlns:a="http://schemas.openxmlformats.org/drawingml/2006/main">
               <a:ext uri="{FF2B5EF4-FFF2-40B4-BE49-F238E27FC236}">
-                <a16:creationId xmlns:a16="http://schemas.microsoft.com/office/drawing/2014/main" id="{3C0DFE9F-DFF3-451F-A3A3-9FF061820020}"/>
+                <a16:creationId xmlns:a16="http://schemas.microsoft.com/office/drawing/2014/main" id="{91A76466-7E78-450D-9F2A-2FEFA8127CFE}"/>
               </a:ext>
             </a:extLst>
           </p:cNvPr>
@@ -1326,7 +1326,7 @@
           <p:nvPr/>
         </p:nvPicPr>
         <p:blipFill>
-          <a:blip xmlns:r="http://schemas.openxmlformats.org/officeDocument/2006/relationships" xmlns:a="http://schemas.openxmlformats.org/drawingml/2006/main" r:embed="Re33e58cc86b14ed1"/>
+          <a:blip xmlns:r="http://schemas.openxmlformats.org/officeDocument/2006/relationships" xmlns:a="http://schemas.openxmlformats.org/drawingml/2006/main" r:embed="Re7779d8fd0544371"/>
           <a:stretch xmlns:a="http://schemas.openxmlformats.org/drawingml/2006/main"/>
         </p:blipFill>
         <p:spPr>
@@ -1344,7 +1344,7 @@
           <p:cNvPr id="10" name="support-border-2">
             <a:extLst xmlns:a="http://schemas.openxmlformats.org/drawingml/2006/main">
               <a:ext uri="{FF2B5EF4-FFF2-40B4-BE49-F238E27FC236}">
-                <a16:creationId xmlns:a16="http://schemas.microsoft.com/office/drawing/2014/main" id="{DE8229F4-DD55-4D34-B388-5C6E3D3ED070}"/>
+                <a16:creationId xmlns:a16="http://schemas.microsoft.com/office/drawing/2014/main" id="{7D9108DF-F781-46FB-94DA-12E2409B67EC}"/>
               </a:ext>
             </a:extLst>
           </p:cNvPr>
@@ -1375,7 +1375,7 @@
           <p:cNvPr id="11" name="support-set">
             <a:extLst xmlns:a="http://schemas.openxmlformats.org/drawingml/2006/main">
               <a:ext uri="{FF2B5EF4-FFF2-40B4-BE49-F238E27FC236}">
-                <a16:creationId xmlns:a16="http://schemas.microsoft.com/office/drawing/2014/main" id="{1B0252CC-9E4D-42B7-B191-FE727A43A8CF}"/>
+                <a16:creationId xmlns:a16="http://schemas.microsoft.com/office/drawing/2014/main" id="{BD214326-EEF7-40E4-A139-3316C78BC63C}"/>
               </a:ext>
             </a:extLst>
           </p:cNvPr>
@@ -1455,7 +1455,7 @@
           <p:cNvPr id="12" name="support-description">
             <a:extLst xmlns:a="http://schemas.openxmlformats.org/drawingml/2006/main">
               <a:ext uri="{FF2B5EF4-FFF2-40B4-BE49-F238E27FC236}">
-                <a16:creationId xmlns:a16="http://schemas.microsoft.com/office/drawing/2014/main" id="{438C24B8-EA67-46AF-BAFB-41D1DBFA5311}"/>
+                <a16:creationId xmlns:a16="http://schemas.microsoft.com/office/drawing/2014/main" id="{393E63C4-09E6-4C55-A6E5-96BB970A2931}"/>
               </a:ext>
             </a:extLst>
           </p:cNvPr>
@@ -1555,7 +1555,7 @@
           <p:cNvPr id="13" name="frozen-box">
             <a:extLst xmlns:a="http://schemas.openxmlformats.org/drawingml/2006/main">
               <a:ext uri="{FF2B5EF4-FFF2-40B4-BE49-F238E27FC236}">
-                <a16:creationId xmlns:a16="http://schemas.microsoft.com/office/drawing/2014/main" id="{E830C5B8-4ABA-44BB-BB70-002D9898DD7E}"/>
+                <a16:creationId xmlns:a16="http://schemas.microsoft.com/office/drawing/2014/main" id="{53403DAC-C115-4784-BD38-C81C5937F3C9}"/>
               </a:ext>
             </a:extLst>
           </p:cNvPr>
@@ -1588,7 +1588,7 @@
           <p:cNvPr id="14" name="frozen-title">
             <a:extLst xmlns:a="http://schemas.openxmlformats.org/drawingml/2006/main">
               <a:ext uri="{FF2B5EF4-FFF2-40B4-BE49-F238E27FC236}">
-                <a16:creationId xmlns:a16="http://schemas.microsoft.com/office/drawing/2014/main" id="{E8A594BC-57A9-4C07-BF15-0F287287E6BE}"/>
+                <a16:creationId xmlns:a16="http://schemas.microsoft.com/office/drawing/2014/main" id="{ED5B9273-E4DB-4BE2-8E6D-893D67C39747}"/>
               </a:ext>
             </a:extLst>
           </p:cNvPr>
@@ -1650,7 +1650,7 @@
           <p:cNvPr id="15" name="branch-0">
             <a:extLst xmlns:a="http://schemas.openxmlformats.org/drawingml/2006/main">
               <a:ext uri="{FF2B5EF4-FFF2-40B4-BE49-F238E27FC236}">
-                <a16:creationId xmlns:a16="http://schemas.microsoft.com/office/drawing/2014/main" id="{FCC0E9A6-1AD5-4D96-BB1C-986B0B10F8D0}"/>
+                <a16:creationId xmlns:a16="http://schemas.microsoft.com/office/drawing/2014/main" id="{CE6756CA-344B-4169-87D4-12D44BC63976}"/>
               </a:ext>
             </a:extLst>
           </p:cNvPr>
@@ -1683,7 +1683,7 @@
           <p:cNvPr id="16" name="branch-label-0">
             <a:extLst xmlns:a="http://schemas.openxmlformats.org/drawingml/2006/main">
               <a:ext uri="{FF2B5EF4-FFF2-40B4-BE49-F238E27FC236}">
-                <a16:creationId xmlns:a16="http://schemas.microsoft.com/office/drawing/2014/main" id="{6FF6D918-B94E-400D-8EB5-73EECC4856FF}"/>
+                <a16:creationId xmlns:a16="http://schemas.microsoft.com/office/drawing/2014/main" id="{494392EE-57E5-455F-84FE-B7278D68D946}"/>
               </a:ext>
             </a:extLst>
           </p:cNvPr>
@@ -1745,7 +1745,7 @@
           <p:cNvPr id="17" name="branch-1">
             <a:extLst xmlns:a="http://schemas.openxmlformats.org/drawingml/2006/main">
               <a:ext uri="{FF2B5EF4-FFF2-40B4-BE49-F238E27FC236}">
-                <a16:creationId xmlns:a16="http://schemas.microsoft.com/office/drawing/2014/main" id="{94603AE1-E28F-4F61-AEB2-1BEB017D71A6}"/>
+                <a16:creationId xmlns:a16="http://schemas.microsoft.com/office/drawing/2014/main" id="{CC5D4F5E-3B1E-42A3-A1C3-4755B25C929F}"/>
               </a:ext>
             </a:extLst>
           </p:cNvPr>
@@ -1778,7 +1778,7 @@
           <p:cNvPr id="18" name="branch-label-1">
             <a:extLst xmlns:a="http://schemas.openxmlformats.org/drawingml/2006/main">
               <a:ext uri="{FF2B5EF4-FFF2-40B4-BE49-F238E27FC236}">
-                <a16:creationId xmlns:a16="http://schemas.microsoft.com/office/drawing/2014/main" id="{C56503B5-7056-4A22-97C0-CA1A8AFD96DA}"/>
+                <a16:creationId xmlns:a16="http://schemas.microsoft.com/office/drawing/2014/main" id="{CDA66387-BCD0-4A89-B7D2-8D751C139269}"/>
               </a:ext>
             </a:extLst>
           </p:cNvPr>
@@ -1840,7 +1840,7 @@
           <p:cNvPr id="19" name="branch-2">
             <a:extLst xmlns:a="http://schemas.openxmlformats.org/drawingml/2006/main">
               <a:ext uri="{FF2B5EF4-FFF2-40B4-BE49-F238E27FC236}">
-                <a16:creationId xmlns:a16="http://schemas.microsoft.com/office/drawing/2014/main" id="{6C317382-0EBF-48C8-90CC-EDB2F09F39F4}"/>
+                <a16:creationId xmlns:a16="http://schemas.microsoft.com/office/drawing/2014/main" id="{C196E2D4-722E-44D3-8ABD-36A09C67B002}"/>
               </a:ext>
             </a:extLst>
           </p:cNvPr>
@@ -1873,7 +1873,7 @@
           <p:cNvPr id="20" name="branch-label-2">
             <a:extLst xmlns:a="http://schemas.openxmlformats.org/drawingml/2006/main">
               <a:ext uri="{FF2B5EF4-FFF2-40B4-BE49-F238E27FC236}">
-                <a16:creationId xmlns:a16="http://schemas.microsoft.com/office/drawing/2014/main" id="{26D7A35E-9B84-4AC1-B573-F49FFEB86705}"/>
+                <a16:creationId xmlns:a16="http://schemas.microsoft.com/office/drawing/2014/main" id="{C06A13D4-D687-4FBD-AC75-AB8CBC46E78D}"/>
               </a:ext>
             </a:extLst>
           </p:cNvPr>
@@ -1962,7 +1962,7 @@
           <p:cNvPr id="21" name="frozen-note">
             <a:extLst xmlns:a="http://schemas.openxmlformats.org/drawingml/2006/main">
               <a:ext uri="{FF2B5EF4-FFF2-40B4-BE49-F238E27FC236}">
-                <a16:creationId xmlns:a16="http://schemas.microsoft.com/office/drawing/2014/main" id="{457E3AC8-EA5E-461D-A8CD-8D37C4B2A2DC}"/>
+                <a16:creationId xmlns:a16="http://schemas.microsoft.com/office/drawing/2014/main" id="{49548193-C1C4-4805-A7F1-CDC5286D3B1C}"/>
               </a:ext>
             </a:extLst>
           </p:cNvPr>
@@ -2024,7 +2024,7 @@
           <p:cNvPr id="22" name="anchor-0">
             <a:extLst xmlns:a="http://schemas.openxmlformats.org/drawingml/2006/main">
               <a:ext uri="{FF2B5EF4-FFF2-40B4-BE49-F238E27FC236}">
-                <a16:creationId xmlns:a16="http://schemas.microsoft.com/office/drawing/2014/main" id="{A44D842F-50DC-4253-8863-70DC3CB32E25}"/>
+                <a16:creationId xmlns:a16="http://schemas.microsoft.com/office/drawing/2014/main" id="{FBB0E017-4906-4590-A276-E7481A440349}"/>
               </a:ext>
             </a:extLst>
           </p:cNvPr>
@@ -2053,7 +2053,7 @@
           <p:cNvPr id="23" name="anchor-1">
             <a:extLst xmlns:a="http://schemas.openxmlformats.org/drawingml/2006/main">
               <a:ext uri="{FF2B5EF4-FFF2-40B4-BE49-F238E27FC236}">
-                <a16:creationId xmlns:a16="http://schemas.microsoft.com/office/drawing/2014/main" id="{4A680AB2-9175-405B-A2FF-9481F3CB00B9}"/>
+                <a16:creationId xmlns:a16="http://schemas.microsoft.com/office/drawing/2014/main" id="{DEB182D8-838B-4827-A546-249E1D56C567}"/>
               </a:ext>
             </a:extLst>
           </p:cNvPr>
@@ -2109,7 +2109,7 @@
           <p:cNvPr id="25" name="anchor-2">
             <a:extLst xmlns:a="http://schemas.openxmlformats.org/drawingml/2006/main">
               <a:ext uri="{FF2B5EF4-FFF2-40B4-BE49-F238E27FC236}">
-                <a16:creationId xmlns:a16="http://schemas.microsoft.com/office/drawing/2014/main" id="{C79887E0-EB54-402C-84AB-2EA1DBE2C552}"/>
+                <a16:creationId xmlns:a16="http://schemas.microsoft.com/office/drawing/2014/main" id="{DFA32277-2AF7-4417-A145-1754037B06BD}"/>
               </a:ext>
             </a:extLst>
           </p:cNvPr>
@@ -2138,7 +2138,7 @@
           <p:cNvPr id="26" name="anchor-3">
             <a:extLst xmlns:a="http://schemas.openxmlformats.org/drawingml/2006/main">
               <a:ext uri="{FF2B5EF4-FFF2-40B4-BE49-F238E27FC236}">
-                <a16:creationId xmlns:a16="http://schemas.microsoft.com/office/drawing/2014/main" id="{21F3B3F2-4E56-42B7-BC5E-17740103F0B7}"/>
+                <a16:creationId xmlns:a16="http://schemas.microsoft.com/office/drawing/2014/main" id="{C668F7F4-800D-4832-9D40-AE9A422A7931}"/>
               </a:ext>
             </a:extLst>
           </p:cNvPr>
@@ -2194,7 +2194,7 @@
           <p:cNvPr id="28" name="alignment-box">
             <a:extLst xmlns:a="http://schemas.openxmlformats.org/drawingml/2006/main">
               <a:ext uri="{FF2B5EF4-FFF2-40B4-BE49-F238E27FC236}">
-                <a16:creationId xmlns:a16="http://schemas.microsoft.com/office/drawing/2014/main" id="{5E0FB66F-6D99-4CBF-8ED4-9AF096B0ECEA}"/>
+                <a16:creationId xmlns:a16="http://schemas.microsoft.com/office/drawing/2014/main" id="{8971FA6A-9FF2-402F-B910-E9291E504F88}"/>
               </a:ext>
             </a:extLst>
           </p:cNvPr>
@@ -2227,7 +2227,7 @@
           <p:cNvPr id="29" name="alignment-title">
             <a:extLst xmlns:a="http://schemas.openxmlformats.org/drawingml/2006/main">
               <a:ext uri="{FF2B5EF4-FFF2-40B4-BE49-F238E27FC236}">
-                <a16:creationId xmlns:a16="http://schemas.microsoft.com/office/drawing/2014/main" id="{DE8944B0-A3E7-4A4B-9277-0C2F42766E58}"/>
+                <a16:creationId xmlns:a16="http://schemas.microsoft.com/office/drawing/2014/main" id="{28CD4EBE-3511-4DED-BC44-F7E69B8105D4}"/>
               </a:ext>
             </a:extLst>
           </p:cNvPr>
@@ -2289,7 +2289,7 @@
           <p:cNvPr id="30" name="feature-grid-0-0">
             <a:extLst xmlns:a="http://schemas.openxmlformats.org/drawingml/2006/main">
               <a:ext uri="{FF2B5EF4-FFF2-40B4-BE49-F238E27FC236}">
-                <a16:creationId xmlns:a16="http://schemas.microsoft.com/office/drawing/2014/main" id="{032B3C95-8100-4A36-AAC7-ADE37668BDFD}"/>
+                <a16:creationId xmlns:a16="http://schemas.microsoft.com/office/drawing/2014/main" id="{ADFCF94D-99CE-4A81-9AD6-83FF2538E220}"/>
               </a:ext>
             </a:extLst>
           </p:cNvPr>
@@ -2322,7 +2322,7 @@
           <p:cNvPr id="31" name="feature-grid-0-1">
             <a:extLst xmlns:a="http://schemas.openxmlformats.org/drawingml/2006/main">
               <a:ext uri="{FF2B5EF4-FFF2-40B4-BE49-F238E27FC236}">
-                <a16:creationId xmlns:a16="http://schemas.microsoft.com/office/drawing/2014/main" id="{BE40A231-A492-443F-A016-966A60CCA67C}"/>
+                <a16:creationId xmlns:a16="http://schemas.microsoft.com/office/drawing/2014/main" id="{60EAC2A1-C293-4A93-B84A-D3BA2A79A2C8}"/>
               </a:ext>
             </a:extLst>
           </p:cNvPr>
@@ -2355,7 +2355,7 @@
           <p:cNvPr id="32" name="feature-grid-0-2">
             <a:extLst xmlns:a="http://schemas.openxmlformats.org/drawingml/2006/main">
               <a:ext uri="{FF2B5EF4-FFF2-40B4-BE49-F238E27FC236}">
-                <a16:creationId xmlns:a16="http://schemas.microsoft.com/office/drawing/2014/main" id="{DE452F7F-9254-49C0-8C56-DE055DECB778}"/>
+                <a16:creationId xmlns:a16="http://schemas.microsoft.com/office/drawing/2014/main" id="{1514508C-9820-4781-807B-6B1E9B11CC63}"/>
               </a:ext>
             </a:extLst>
           </p:cNvPr>
@@ -2388,7 +2388,7 @@
           <p:cNvPr id="33" name="feature-grid-1-0">
             <a:extLst xmlns:a="http://schemas.openxmlformats.org/drawingml/2006/main">
               <a:ext uri="{FF2B5EF4-FFF2-40B4-BE49-F238E27FC236}">
-                <a16:creationId xmlns:a16="http://schemas.microsoft.com/office/drawing/2014/main" id="{0EAC9203-2247-4DBB-B310-65E80A455F5F}"/>
+                <a16:creationId xmlns:a16="http://schemas.microsoft.com/office/drawing/2014/main" id="{2BFD1ECB-8148-4179-80D9-59DEAD2F1393}"/>
               </a:ext>
             </a:extLst>
           </p:cNvPr>
@@ -2421,7 +2421,7 @@
           <p:cNvPr id="34" name="feature-grid-1-1">
             <a:extLst xmlns:a="http://schemas.openxmlformats.org/drawingml/2006/main">
               <a:ext uri="{FF2B5EF4-FFF2-40B4-BE49-F238E27FC236}">
-                <a16:creationId xmlns:a16="http://schemas.microsoft.com/office/drawing/2014/main" id="{061BCEEE-AD4A-4A37-8714-82E11F5F33AA}"/>
+                <a16:creationId xmlns:a16="http://schemas.microsoft.com/office/drawing/2014/main" id="{6D3DCB05-83BA-4553-BB50-3BBCBEB14FE4}"/>
               </a:ext>
             </a:extLst>
           </p:cNvPr>
@@ -2454,7 +2454,7 @@
           <p:cNvPr id="35" name="feature-grid-1-2">
             <a:extLst xmlns:a="http://schemas.openxmlformats.org/drawingml/2006/main">
               <a:ext uri="{FF2B5EF4-FFF2-40B4-BE49-F238E27FC236}">
-                <a16:creationId xmlns:a16="http://schemas.microsoft.com/office/drawing/2014/main" id="{825B063D-7728-4B89-81D4-B5BE27F70595}"/>
+                <a16:creationId xmlns:a16="http://schemas.microsoft.com/office/drawing/2014/main" id="{89431F01-8BDB-49B4-80DE-E436FD74698C}"/>
               </a:ext>
             </a:extLst>
           </p:cNvPr>
@@ -2487,7 +2487,7 @@
           <p:cNvPr id="36" name="feature-grid-2-0">
             <a:extLst xmlns:a="http://schemas.openxmlformats.org/drawingml/2006/main">
               <a:ext uri="{FF2B5EF4-FFF2-40B4-BE49-F238E27FC236}">
-                <a16:creationId xmlns:a16="http://schemas.microsoft.com/office/drawing/2014/main" id="{EF66CC18-C6BB-4972-9201-DD93F3163330}"/>
+                <a16:creationId xmlns:a16="http://schemas.microsoft.com/office/drawing/2014/main" id="{954B5308-7426-4FD0-89BB-31941FBD7D02}"/>
               </a:ext>
             </a:extLst>
           </p:cNvPr>
@@ -2520,7 +2520,7 @@
           <p:cNvPr id="37" name="feature-grid-2-1">
             <a:extLst xmlns:a="http://schemas.openxmlformats.org/drawingml/2006/main">
               <a:ext uri="{FF2B5EF4-FFF2-40B4-BE49-F238E27FC236}">
-                <a16:creationId xmlns:a16="http://schemas.microsoft.com/office/drawing/2014/main" id="{EFEB1B1E-ED57-4E3B-85BB-CE1EAB9ACF5D}"/>
+                <a16:creationId xmlns:a16="http://schemas.microsoft.com/office/drawing/2014/main" id="{57E8E774-6DD1-4B54-A95F-EAD1C221703E}"/>
               </a:ext>
             </a:extLst>
           </p:cNvPr>
@@ -2553,7 +2553,7 @@
           <p:cNvPr id="38" name="feature-grid-2-2">
             <a:extLst xmlns:a="http://schemas.openxmlformats.org/drawingml/2006/main">
               <a:ext uri="{FF2B5EF4-FFF2-40B4-BE49-F238E27FC236}">
-                <a16:creationId xmlns:a16="http://schemas.microsoft.com/office/drawing/2014/main" id="{BFF3212E-D979-47E0-B814-3717CA456789}"/>
+                <a16:creationId xmlns:a16="http://schemas.microsoft.com/office/drawing/2014/main" id="{74B24B84-2AF2-4161-87E6-BB9E426A7FDC}"/>
               </a:ext>
             </a:extLst>
           </p:cNvPr>
@@ -2586,7 +2586,7 @@
           <p:cNvPr id="39" name="unit-norm">
             <a:extLst xmlns:a="http://schemas.openxmlformats.org/drawingml/2006/main">
               <a:ext uri="{FF2B5EF4-FFF2-40B4-BE49-F238E27FC236}">
-                <a16:creationId xmlns:a16="http://schemas.microsoft.com/office/drawing/2014/main" id="{3BE778F9-EF7C-4DA4-820E-D28EFD014A56}"/>
+                <a16:creationId xmlns:a16="http://schemas.microsoft.com/office/drawing/2014/main" id="{158643FD-A7A0-40A9-85F5-744CF9C1B744}"/>
               </a:ext>
             </a:extLst>
           </p:cNvPr>
@@ -2666,7 +2666,7 @@
           <p:cNvPr id="40" name="aligned-note">
             <a:extLst xmlns:a="http://schemas.openxmlformats.org/drawingml/2006/main">
               <a:ext uri="{FF2B5EF4-FFF2-40B4-BE49-F238E27FC236}">
-                <a16:creationId xmlns:a16="http://schemas.microsoft.com/office/drawing/2014/main" id="{F13F5F91-F554-4382-A943-18A003FAB26A}"/>
+                <a16:creationId xmlns:a16="http://schemas.microsoft.com/office/drawing/2014/main" id="{E44D9148-F67A-4A3F-90CC-97616DEF4889}"/>
               </a:ext>
             </a:extLst>
           </p:cNvPr>
@@ -2728,7 +2728,7 @@
           <p:cNvPr id="41" name="anchor-4">
             <a:extLst xmlns:a="http://schemas.openxmlformats.org/drawingml/2006/main">
               <a:ext uri="{FF2B5EF4-FFF2-40B4-BE49-F238E27FC236}">
-                <a16:creationId xmlns:a16="http://schemas.microsoft.com/office/drawing/2014/main" id="{0E451D02-52C2-40AA-B6A0-D74EF4975107}"/>
+                <a16:creationId xmlns:a16="http://schemas.microsoft.com/office/drawing/2014/main" id="{F7A16AF1-FD7F-403E-AA93-B978536CB09D}"/>
               </a:ext>
             </a:extLst>
           </p:cNvPr>
@@ -2757,7 +2757,7 @@
           <p:cNvPr id="42" name="anchor-5">
             <a:extLst xmlns:a="http://schemas.openxmlformats.org/drawingml/2006/main">
               <a:ext uri="{FF2B5EF4-FFF2-40B4-BE49-F238E27FC236}">
-                <a16:creationId xmlns:a16="http://schemas.microsoft.com/office/drawing/2014/main" id="{58186DF2-E943-4537-91F8-23595F788F6F}"/>
+                <a16:creationId xmlns:a16="http://schemas.microsoft.com/office/drawing/2014/main" id="{CC6FB4FC-E58E-49A6-8FA0-DA71CB8AA48D}"/>
               </a:ext>
             </a:extLst>
           </p:cNvPr>
@@ -2813,7 +2813,7 @@
           <p:cNvPr id="44" name="bank-box">
             <a:extLst xmlns:a="http://schemas.openxmlformats.org/drawingml/2006/main">
               <a:ext uri="{FF2B5EF4-FFF2-40B4-BE49-F238E27FC236}">
-                <a16:creationId xmlns:a16="http://schemas.microsoft.com/office/drawing/2014/main" id="{DA3C5380-B4B8-4469-8190-4B4CA9668850}"/>
+                <a16:creationId xmlns:a16="http://schemas.microsoft.com/office/drawing/2014/main" id="{2D088903-AE21-43D2-8AD0-C38326A9BAB9}"/>
               </a:ext>
             </a:extLst>
           </p:cNvPr>
@@ -2846,7 +2846,7 @@
           <p:cNvPr id="45" name="bank-title">
             <a:extLst xmlns:a="http://schemas.openxmlformats.org/drawingml/2006/main">
               <a:ext uri="{FF2B5EF4-FFF2-40B4-BE49-F238E27FC236}">
-                <a16:creationId xmlns:a16="http://schemas.microsoft.com/office/drawing/2014/main" id="{672B821A-7B34-4275-8412-59CB181995BD}"/>
+                <a16:creationId xmlns:a16="http://schemas.microsoft.com/office/drawing/2014/main" id="{5DA54EDC-B104-412D-9444-0AE1905D9A98}"/>
               </a:ext>
             </a:extLst>
           </p:cNvPr>
@@ -2908,7 +2908,7 @@
           <p:cNvPr id="46" name="bank-0-0">
             <a:extLst xmlns:a="http://schemas.openxmlformats.org/drawingml/2006/main">
               <a:ext uri="{FF2B5EF4-FFF2-40B4-BE49-F238E27FC236}">
-                <a16:creationId xmlns:a16="http://schemas.microsoft.com/office/drawing/2014/main" id="{EF4E5B0D-BC47-41D9-885F-BE1F98912467}"/>
+                <a16:creationId xmlns:a16="http://schemas.microsoft.com/office/drawing/2014/main" id="{D752B6CC-F6C0-48D6-92A5-CF58859D6DC7}"/>
               </a:ext>
             </a:extLst>
           </p:cNvPr>
@@ -2941,7 +2941,7 @@
           <p:cNvPr id="47" name="bank-0-1">
             <a:extLst xmlns:a="http://schemas.openxmlformats.org/drawingml/2006/main">
               <a:ext uri="{FF2B5EF4-FFF2-40B4-BE49-F238E27FC236}">
-                <a16:creationId xmlns:a16="http://schemas.microsoft.com/office/drawing/2014/main" id="{E036071A-752C-403F-BB0C-2001A682A793}"/>
+                <a16:creationId xmlns:a16="http://schemas.microsoft.com/office/drawing/2014/main" id="{9687BD31-5208-4AF9-8589-A5D6C4340788}"/>
               </a:ext>
             </a:extLst>
           </p:cNvPr>
@@ -2974,7 +2974,7 @@
           <p:cNvPr id="48" name="bank-0-2">
             <a:extLst xmlns:a="http://schemas.openxmlformats.org/drawingml/2006/main">
               <a:ext uri="{FF2B5EF4-FFF2-40B4-BE49-F238E27FC236}">
-                <a16:creationId xmlns:a16="http://schemas.microsoft.com/office/drawing/2014/main" id="{B19B8946-B0ED-43D2-B17D-4C77488EA1D1}"/>
+                <a16:creationId xmlns:a16="http://schemas.microsoft.com/office/drawing/2014/main" id="{230672C3-FA32-40E3-AB9E-2A01345C9A36}"/>
               </a:ext>
             </a:extLst>
           </p:cNvPr>
@@ -3007,7 +3007,7 @@
           <p:cNvPr id="49" name="bank-0-3">
             <a:extLst xmlns:a="http://schemas.openxmlformats.org/drawingml/2006/main">
               <a:ext uri="{FF2B5EF4-FFF2-40B4-BE49-F238E27FC236}">
-                <a16:creationId xmlns:a16="http://schemas.microsoft.com/office/drawing/2014/main" id="{3854C60E-3269-42CE-BA5A-EAED2EC27951}"/>
+                <a16:creationId xmlns:a16="http://schemas.microsoft.com/office/drawing/2014/main" id="{C174996C-470C-433E-A7B7-EA0463D2ACC4}"/>
               </a:ext>
             </a:extLst>
           </p:cNvPr>
@@ -3040,7 +3040,7 @@
           <p:cNvPr id="50" name="bank-0-4">
             <a:extLst xmlns:a="http://schemas.openxmlformats.org/drawingml/2006/main">
               <a:ext uri="{FF2B5EF4-FFF2-40B4-BE49-F238E27FC236}">
-                <a16:creationId xmlns:a16="http://schemas.microsoft.com/office/drawing/2014/main" id="{82E1FF43-B916-45F8-9D62-80FFE681FEAF}"/>
+                <a16:creationId xmlns:a16="http://schemas.microsoft.com/office/drawing/2014/main" id="{B0FF1C35-4319-4061-8160-3945BB718FB8}"/>
               </a:ext>
             </a:extLst>
           </p:cNvPr>
@@ -3073,7 +3073,7 @@
           <p:cNvPr id="51" name="bank-0-5">
             <a:extLst xmlns:a="http://schemas.openxmlformats.org/drawingml/2006/main">
               <a:ext uri="{FF2B5EF4-FFF2-40B4-BE49-F238E27FC236}">
-                <a16:creationId xmlns:a16="http://schemas.microsoft.com/office/drawing/2014/main" id="{F9969385-C699-41AD-B61C-CCCC590D2A7B}"/>
+                <a16:creationId xmlns:a16="http://schemas.microsoft.com/office/drawing/2014/main" id="{62E79383-066E-400E-A62C-8AED667BC81C}"/>
               </a:ext>
             </a:extLst>
           </p:cNvPr>
@@ -3106,7 +3106,7 @@
           <p:cNvPr id="52" name="bank-0-6">
             <a:extLst xmlns:a="http://schemas.openxmlformats.org/drawingml/2006/main">
               <a:ext uri="{FF2B5EF4-FFF2-40B4-BE49-F238E27FC236}">
-                <a16:creationId xmlns:a16="http://schemas.microsoft.com/office/drawing/2014/main" id="{C82E01D7-8FD1-4836-AF30-2A10CDF619DA}"/>
+                <a16:creationId xmlns:a16="http://schemas.microsoft.com/office/drawing/2014/main" id="{ECEAD69B-C6B8-4328-81A7-C48AF1DEE636}"/>
               </a:ext>
             </a:extLst>
           </p:cNvPr>
@@ -3139,7 +3139,7 @@
           <p:cNvPr id="53" name="bank-0-7">
             <a:extLst xmlns:a="http://schemas.openxmlformats.org/drawingml/2006/main">
               <a:ext uri="{FF2B5EF4-FFF2-40B4-BE49-F238E27FC236}">
-                <a16:creationId xmlns:a16="http://schemas.microsoft.com/office/drawing/2014/main" id="{C8C2C29C-B7A7-4890-AEFA-CE7A0DC0C03E}"/>
+                <a16:creationId xmlns:a16="http://schemas.microsoft.com/office/drawing/2014/main" id="{AB9E6977-79A3-4D40-AA43-0C4714BCB144}"/>
               </a:ext>
             </a:extLst>
           </p:cNvPr>
@@ -3172,7 +3172,7 @@
           <p:cNvPr id="54" name="bank-1-0">
             <a:extLst xmlns:a="http://schemas.openxmlformats.org/drawingml/2006/main">
               <a:ext uri="{FF2B5EF4-FFF2-40B4-BE49-F238E27FC236}">
-                <a16:creationId xmlns:a16="http://schemas.microsoft.com/office/drawing/2014/main" id="{C042AE2C-D7A9-480C-81CE-43811B24C31F}"/>
+                <a16:creationId xmlns:a16="http://schemas.microsoft.com/office/drawing/2014/main" id="{FB139640-2C1A-42FB-83CE-EE92CBF5EF8F}"/>
               </a:ext>
             </a:extLst>
           </p:cNvPr>
@@ -3205,7 +3205,7 @@
           <p:cNvPr id="55" name="bank-1-1">
             <a:extLst xmlns:a="http://schemas.openxmlformats.org/drawingml/2006/main">
               <a:ext uri="{FF2B5EF4-FFF2-40B4-BE49-F238E27FC236}">
-                <a16:creationId xmlns:a16="http://schemas.microsoft.com/office/drawing/2014/main" id="{A75CB5E1-0E09-42CC-8286-25D0874B564D}"/>
+                <a16:creationId xmlns:a16="http://schemas.microsoft.com/office/drawing/2014/main" id="{04FDCEBB-E4F9-45A5-9CD9-148B93F01CE6}"/>
               </a:ext>
             </a:extLst>
           </p:cNvPr>
@@ -3238,7 +3238,7 @@
           <p:cNvPr id="56" name="bank-1-2">
             <a:extLst xmlns:a="http://schemas.openxmlformats.org/drawingml/2006/main">
               <a:ext uri="{FF2B5EF4-FFF2-40B4-BE49-F238E27FC236}">
-                <a16:creationId xmlns:a16="http://schemas.microsoft.com/office/drawing/2014/main" id="{FFFD28DF-B481-4767-84B3-260F428DC094}"/>
+                <a16:creationId xmlns:a16="http://schemas.microsoft.com/office/drawing/2014/main" id="{ED717057-87C8-4C47-BA36-AB5D03EA6630}"/>
               </a:ext>
             </a:extLst>
           </p:cNvPr>
@@ -3271,7 +3271,7 @@
           <p:cNvPr id="57" name="bank-1-3">
             <a:extLst xmlns:a="http://schemas.openxmlformats.org/drawingml/2006/main">
               <a:ext uri="{FF2B5EF4-FFF2-40B4-BE49-F238E27FC236}">
-                <a16:creationId xmlns:a16="http://schemas.microsoft.com/office/drawing/2014/main" id="{8916750D-CDC1-42F1-8902-F2D9A67A2F06}"/>
+                <a16:creationId xmlns:a16="http://schemas.microsoft.com/office/drawing/2014/main" id="{6798AFB3-69C2-4EE2-9814-F393BDCDD6F7}"/>
               </a:ext>
             </a:extLst>
           </p:cNvPr>
@@ -3304,7 +3304,7 @@
           <p:cNvPr id="58" name="bank-1-4">
             <a:extLst xmlns:a="http://schemas.openxmlformats.org/drawingml/2006/main">
               <a:ext uri="{FF2B5EF4-FFF2-40B4-BE49-F238E27FC236}">
-                <a16:creationId xmlns:a16="http://schemas.microsoft.com/office/drawing/2014/main" id="{C8C4094D-333F-4E20-86F2-F796A1D35984}"/>
+                <a16:creationId xmlns:a16="http://schemas.microsoft.com/office/drawing/2014/main" id="{D4CE0CF7-E7AC-41EB-9959-77ECADC1F462}"/>
               </a:ext>
             </a:extLst>
           </p:cNvPr>
@@ -3337,7 +3337,7 @@
           <p:cNvPr id="59" name="bank-1-5">
             <a:extLst xmlns:a="http://schemas.openxmlformats.org/drawingml/2006/main">
               <a:ext uri="{FF2B5EF4-FFF2-40B4-BE49-F238E27FC236}">
-                <a16:creationId xmlns:a16="http://schemas.microsoft.com/office/drawing/2014/main" id="{ECFC20E3-C1E4-48C9-8D4A-8E08C7A7B158}"/>
+                <a16:creationId xmlns:a16="http://schemas.microsoft.com/office/drawing/2014/main" id="{236472CA-C3EC-4A85-9780-14CF4E5E194D}"/>
               </a:ext>
             </a:extLst>
           </p:cNvPr>
@@ -3370,7 +3370,7 @@
           <p:cNvPr id="60" name="bank-1-6">
             <a:extLst xmlns:a="http://schemas.openxmlformats.org/drawingml/2006/main">
               <a:ext uri="{FF2B5EF4-FFF2-40B4-BE49-F238E27FC236}">
-                <a16:creationId xmlns:a16="http://schemas.microsoft.com/office/drawing/2014/main" id="{FC64F053-4A28-4DDB-9D75-A9E8103D4AA1}"/>
+                <a16:creationId xmlns:a16="http://schemas.microsoft.com/office/drawing/2014/main" id="{E211A0B2-A951-446A-8F80-471F437BD597}"/>
               </a:ext>
             </a:extLst>
           </p:cNvPr>
@@ -3403,7 +3403,7 @@
           <p:cNvPr id="61" name="bank-1-7">
             <a:extLst xmlns:a="http://schemas.openxmlformats.org/drawingml/2006/main">
               <a:ext uri="{FF2B5EF4-FFF2-40B4-BE49-F238E27FC236}">
-                <a16:creationId xmlns:a16="http://schemas.microsoft.com/office/drawing/2014/main" id="{031405AE-5AA0-423A-A656-65FE607388AE}"/>
+                <a16:creationId xmlns:a16="http://schemas.microsoft.com/office/drawing/2014/main" id="{16F2E88C-E4C1-4C1B-B8B1-EB1E763C3F44}"/>
               </a:ext>
             </a:extLst>
           </p:cNvPr>
@@ -3436,7 +3436,7 @@
           <p:cNvPr id="62" name="bank-2-0">
             <a:extLst xmlns:a="http://schemas.openxmlformats.org/drawingml/2006/main">
               <a:ext uri="{FF2B5EF4-FFF2-40B4-BE49-F238E27FC236}">
-                <a16:creationId xmlns:a16="http://schemas.microsoft.com/office/drawing/2014/main" id="{2A68403A-2377-4743-BCBA-B20D26CCC11C}"/>
+                <a16:creationId xmlns:a16="http://schemas.microsoft.com/office/drawing/2014/main" id="{27155BEE-44DE-4E43-964D-0652C2DF2677}"/>
               </a:ext>
             </a:extLst>
           </p:cNvPr>
@@ -3469,7 +3469,7 @@
           <p:cNvPr id="63" name="bank-2-1">
             <a:extLst xmlns:a="http://schemas.openxmlformats.org/drawingml/2006/main">
               <a:ext uri="{FF2B5EF4-FFF2-40B4-BE49-F238E27FC236}">
-                <a16:creationId xmlns:a16="http://schemas.microsoft.com/office/drawing/2014/main" id="{59771C49-9259-4BCC-91D0-76F3FB20FAD1}"/>
+                <a16:creationId xmlns:a16="http://schemas.microsoft.com/office/drawing/2014/main" id="{DB2DEECE-8E9B-4B99-9D57-4DF989E7B840}"/>
               </a:ext>
             </a:extLst>
           </p:cNvPr>
@@ -3502,7 +3502,7 @@
           <p:cNvPr id="64" name="bank-2-2">
             <a:extLst xmlns:a="http://schemas.openxmlformats.org/drawingml/2006/main">
               <a:ext uri="{FF2B5EF4-FFF2-40B4-BE49-F238E27FC236}">
-                <a16:creationId xmlns:a16="http://schemas.microsoft.com/office/drawing/2014/main" id="{3C4E2EDC-2F46-4C71-B077-30FFA30AE47B}"/>
+                <a16:creationId xmlns:a16="http://schemas.microsoft.com/office/drawing/2014/main" id="{42C14849-8FFA-4F32-BDB7-7042B6769461}"/>
               </a:ext>
             </a:extLst>
           </p:cNvPr>
@@ -3535,7 +3535,7 @@
           <p:cNvPr id="65" name="bank-2-3">
             <a:extLst xmlns:a="http://schemas.openxmlformats.org/drawingml/2006/main">
               <a:ext uri="{FF2B5EF4-FFF2-40B4-BE49-F238E27FC236}">
-                <a16:creationId xmlns:a16="http://schemas.microsoft.com/office/drawing/2014/main" id="{3E85D94B-27A8-4ACA-A405-2C0BF5B7A7B9}"/>
+                <a16:creationId xmlns:a16="http://schemas.microsoft.com/office/drawing/2014/main" id="{0F6625AE-E1AF-4AD6-B2A4-54755904030C}"/>
               </a:ext>
             </a:extLst>
           </p:cNvPr>
@@ -3568,7 +3568,7 @@
           <p:cNvPr id="66" name="bank-2-4">
             <a:extLst xmlns:a="http://schemas.openxmlformats.org/drawingml/2006/main">
               <a:ext uri="{FF2B5EF4-FFF2-40B4-BE49-F238E27FC236}">
-                <a16:creationId xmlns:a16="http://schemas.microsoft.com/office/drawing/2014/main" id="{FE6EC504-BA03-4EF8-BF04-6816BD841C99}"/>
+                <a16:creationId xmlns:a16="http://schemas.microsoft.com/office/drawing/2014/main" id="{23222AD7-45FB-4B14-A05C-C22B3E791EFD}"/>
               </a:ext>
             </a:extLst>
           </p:cNvPr>
@@ -3601,7 +3601,7 @@
           <p:cNvPr id="67" name="bank-2-5">
             <a:extLst xmlns:a="http://schemas.openxmlformats.org/drawingml/2006/main">
               <a:ext uri="{FF2B5EF4-FFF2-40B4-BE49-F238E27FC236}">
-                <a16:creationId xmlns:a16="http://schemas.microsoft.com/office/drawing/2014/main" id="{569C3325-DB0B-45B9-855A-C70DC9D07282}"/>
+                <a16:creationId xmlns:a16="http://schemas.microsoft.com/office/drawing/2014/main" id="{0A43B7FA-3CE7-434C-83B9-1897192E4C43}"/>
               </a:ext>
             </a:extLst>
           </p:cNvPr>
@@ -3634,7 +3634,7 @@
           <p:cNvPr id="68" name="bank-2-6">
             <a:extLst xmlns:a="http://schemas.openxmlformats.org/drawingml/2006/main">
               <a:ext uri="{FF2B5EF4-FFF2-40B4-BE49-F238E27FC236}">
-                <a16:creationId xmlns:a16="http://schemas.microsoft.com/office/drawing/2014/main" id="{1E037571-7EB6-479E-90F7-F420ECBFFCBA}"/>
+                <a16:creationId xmlns:a16="http://schemas.microsoft.com/office/drawing/2014/main" id="{B3170571-5094-4768-8341-CF16E1225D6F}"/>
               </a:ext>
             </a:extLst>
           </p:cNvPr>
@@ -3667,7 +3667,7 @@
           <p:cNvPr id="69" name="bank-2-7">
             <a:extLst xmlns:a="http://schemas.openxmlformats.org/drawingml/2006/main">
               <a:ext uri="{FF2B5EF4-FFF2-40B4-BE49-F238E27FC236}">
-                <a16:creationId xmlns:a16="http://schemas.microsoft.com/office/drawing/2014/main" id="{91C64F6E-2A30-4DF3-B26C-CF4B627BAF2C}"/>
+                <a16:creationId xmlns:a16="http://schemas.microsoft.com/office/drawing/2014/main" id="{93083BD0-A8E4-42BD-8D6B-B3EE4EF4E7CD}"/>
               </a:ext>
             </a:extLst>
           </p:cNvPr>
@@ -3700,7 +3700,7 @@
           <p:cNvPr id="70" name="bank-accent">
             <a:extLst xmlns:a="http://schemas.openxmlformats.org/drawingml/2006/main">
               <a:ext uri="{FF2B5EF4-FFF2-40B4-BE49-F238E27FC236}">
-                <a16:creationId xmlns:a16="http://schemas.microsoft.com/office/drawing/2014/main" id="{AA9E15B9-9309-44D0-82A5-BDCC82FC41EB}"/>
+                <a16:creationId xmlns:a16="http://schemas.microsoft.com/office/drawing/2014/main" id="{8A42ACF9-EE2E-4D1F-8C7E-1C4CEF59AC6E}"/>
               </a:ext>
             </a:extLst>
           </p:cNvPr>
@@ -3731,7 +3731,7 @@
           <p:cNvPr id="71" name="candidate-set">
             <a:extLst xmlns:a="http://schemas.openxmlformats.org/drawingml/2006/main">
               <a:ext uri="{FF2B5EF4-FFF2-40B4-BE49-F238E27FC236}">
-                <a16:creationId xmlns:a16="http://schemas.microsoft.com/office/drawing/2014/main" id="{103D1E49-B06D-4AE1-8753-FB9B94B790A1}"/>
+                <a16:creationId xmlns:a16="http://schemas.microsoft.com/office/drawing/2014/main" id="{F4E234FB-B933-4AB1-A9C1-A063B61B901A}"/>
               </a:ext>
             </a:extLst>
           </p:cNvPr>
@@ -3811,7 +3811,7 @@
           <p:cNvPr id="72" name="bank-note">
             <a:extLst xmlns:a="http://schemas.openxmlformats.org/drawingml/2006/main">
               <a:ext uri="{FF2B5EF4-FFF2-40B4-BE49-F238E27FC236}">
-                <a16:creationId xmlns:a16="http://schemas.microsoft.com/office/drawing/2014/main" id="{97A9983F-25C1-4C25-ACF5-C102541B8747}"/>
+                <a16:creationId xmlns:a16="http://schemas.microsoft.com/office/drawing/2014/main" id="{0E71D3DB-158E-4141-B9AC-F7ED312440FE}"/>
               </a:ext>
             </a:extLst>
           </p:cNvPr>
@@ -3873,7 +3873,7 @@
           <p:cNvPr id="73" name="anchor-6">
             <a:extLst xmlns:a="http://schemas.openxmlformats.org/drawingml/2006/main">
               <a:ext uri="{FF2B5EF4-FFF2-40B4-BE49-F238E27FC236}">
-                <a16:creationId xmlns:a16="http://schemas.microsoft.com/office/drawing/2014/main" id="{EA35ABC2-ECCF-414A-948D-68956753A1A3}"/>
+                <a16:creationId xmlns:a16="http://schemas.microsoft.com/office/drawing/2014/main" id="{A80C25A2-87B3-4C77-84E4-1DFC95ECB3D6}"/>
               </a:ext>
             </a:extLst>
           </p:cNvPr>
@@ -3902,7 +3902,7 @@
           <p:cNvPr id="74" name="anchor-7">
             <a:extLst xmlns:a="http://schemas.openxmlformats.org/drawingml/2006/main">
               <a:ext uri="{FF2B5EF4-FFF2-40B4-BE49-F238E27FC236}">
-                <a16:creationId xmlns:a16="http://schemas.microsoft.com/office/drawing/2014/main" id="{ED41E342-6779-4657-8374-D3948365FC7E}"/>
+                <a16:creationId xmlns:a16="http://schemas.microsoft.com/office/drawing/2014/main" id="{94A1A8BA-90A5-43A5-ACEE-0C7A269FE934}"/>
               </a:ext>
             </a:extLst>
           </p:cNvPr>
@@ -3958,7 +3958,7 @@
           <p:cNvPr id="76" name="anchor-8">
             <a:extLst xmlns:a="http://schemas.openxmlformats.org/drawingml/2006/main">
               <a:ext uri="{FF2B5EF4-FFF2-40B4-BE49-F238E27FC236}">
-                <a16:creationId xmlns:a16="http://schemas.microsoft.com/office/drawing/2014/main" id="{4109B7C3-31FF-487B-9DAC-53F2511C7C0F}"/>
+                <a16:creationId xmlns:a16="http://schemas.microsoft.com/office/drawing/2014/main" id="{ADB3EAFA-0448-49FE-A927-4E7E3E4484E2}"/>
               </a:ext>
             </a:extLst>
           </p:cNvPr>
@@ -3987,7 +3987,7 @@
           <p:cNvPr id="77" name="anchor-9">
             <a:extLst xmlns:a="http://schemas.openxmlformats.org/drawingml/2006/main">
               <a:ext uri="{FF2B5EF4-FFF2-40B4-BE49-F238E27FC236}">
-                <a16:creationId xmlns:a16="http://schemas.microsoft.com/office/drawing/2014/main" id="{091F7D70-568A-4313-8317-635F9FBAAF37}"/>
+                <a16:creationId xmlns:a16="http://schemas.microsoft.com/office/drawing/2014/main" id="{00CF8A05-3F3C-4833-9BCD-AC68EA3CFDB6}"/>
               </a:ext>
             </a:extLst>
           </p:cNvPr>
@@ -4043,7 +4043,7 @@
           <p:cNvPr id="79" name="anchor-10">
             <a:extLst xmlns:a="http://schemas.openxmlformats.org/drawingml/2006/main">
               <a:ext uri="{FF2B5EF4-FFF2-40B4-BE49-F238E27FC236}">
-                <a16:creationId xmlns:a16="http://schemas.microsoft.com/office/drawing/2014/main" id="{26382462-C98B-4870-8BF9-4F4B835FC049}"/>
+                <a16:creationId xmlns:a16="http://schemas.microsoft.com/office/drawing/2014/main" id="{2ABC9496-A6D5-4061-97C0-1B27F12D9C44}"/>
               </a:ext>
             </a:extLst>
           </p:cNvPr>
@@ -4072,7 +4072,7 @@
           <p:cNvPr id="80" name="anchor-11">
             <a:extLst xmlns:a="http://schemas.openxmlformats.org/drawingml/2006/main">
               <a:ext uri="{FF2B5EF4-FFF2-40B4-BE49-F238E27FC236}">
-                <a16:creationId xmlns:a16="http://schemas.microsoft.com/office/drawing/2014/main" id="{38504AFC-4403-48C3-866A-E83195141275}"/>
+                <a16:creationId xmlns:a16="http://schemas.microsoft.com/office/drawing/2014/main" id="{885AB1E8-0451-4136-B248-11A58376305D}"/>
               </a:ext>
             </a:extLst>
           </p:cNvPr>
@@ -4128,7 +4128,7 @@
           <p:cNvPr id="82" name="read-only">
             <a:extLst xmlns:a="http://schemas.openxmlformats.org/drawingml/2006/main">
               <a:ext uri="{FF2B5EF4-FFF2-40B4-BE49-F238E27FC236}">
-                <a16:creationId xmlns:a16="http://schemas.microsoft.com/office/drawing/2014/main" id="{44E5DBF9-7E61-4DF0-AA6D-EA1616083B07}"/>
+                <a16:creationId xmlns:a16="http://schemas.microsoft.com/office/drawing/2014/main" id="{893C2DAE-FEF7-4AFA-9B91-66C8BD87A2C0}"/>
               </a:ext>
             </a:extLst>
           </p:cNvPr>
@@ -4190,7 +4190,7 @@
           <p:cNvPr id="83" name="section-b">
             <a:extLst xmlns:a="http://schemas.openxmlformats.org/drawingml/2006/main">
               <a:ext uri="{FF2B5EF4-FFF2-40B4-BE49-F238E27FC236}">
-                <a16:creationId xmlns:a16="http://schemas.microsoft.com/office/drawing/2014/main" id="{CDA86B7A-5758-45FA-9262-58F7AAE98EC2}"/>
+                <a16:creationId xmlns:a16="http://schemas.microsoft.com/office/drawing/2014/main" id="{56051147-9438-4D0F-8862-BAB8A82E74D8}"/>
               </a:ext>
             </a:extLst>
           </p:cNvPr>
@@ -4256,7 +4256,7 @@
           <p:nvPr/>
         </p:nvPicPr>
         <p:blipFill>
-          <a:blip xmlns:r="http://schemas.openxmlformats.org/officeDocument/2006/relationships" xmlns:a="http://schemas.openxmlformats.org/drawingml/2006/main" r:embed="Rb9dfd7f127eb45a7"/>
+          <a:blip xmlns:r="http://schemas.openxmlformats.org/officeDocument/2006/relationships" xmlns:a="http://schemas.openxmlformats.org/drawingml/2006/main" r:embed="R72b32a40e7e0481f"/>
           <a:stretch xmlns:a="http://schemas.openxmlformats.org/drawingml/2006/main"/>
         </p:blipFill>
         <p:spPr>
@@ -4274,7 +4274,7 @@
           <p:cNvPr id="85" name="query-frame">
             <a:extLst xmlns:a="http://schemas.openxmlformats.org/drawingml/2006/main">
               <a:ext uri="{FF2B5EF4-FFF2-40B4-BE49-F238E27FC236}">
-                <a16:creationId xmlns:a16="http://schemas.microsoft.com/office/drawing/2014/main" id="{8AC57754-46F0-466E-94A8-BF791569FF13}"/>
+                <a16:creationId xmlns:a16="http://schemas.microsoft.com/office/drawing/2014/main" id="{C099170E-4546-4C60-BD94-EE5DE513CDD3}"/>
               </a:ext>
             </a:extLst>
           </p:cNvPr>
@@ -4305,7 +4305,7 @@
           <p:cNvPr id="86" name="query-input">
             <a:extLst xmlns:a="http://schemas.openxmlformats.org/drawingml/2006/main">
               <a:ext uri="{FF2B5EF4-FFF2-40B4-BE49-F238E27FC236}">
-                <a16:creationId xmlns:a16="http://schemas.microsoft.com/office/drawing/2014/main" id="{E1F48D77-B932-4EA1-98FE-F1875055D5FC}"/>
+                <a16:creationId xmlns:a16="http://schemas.microsoft.com/office/drawing/2014/main" id="{E004B20E-A2D2-416A-B640-8C12BE3790D4}"/>
               </a:ext>
             </a:extLst>
           </p:cNvPr>
@@ -4374,7 +4374,7 @@
           <p:cNvPr id="87" name="anchor-12">
             <a:extLst xmlns:a="http://schemas.openxmlformats.org/drawingml/2006/main">
               <a:ext uri="{FF2B5EF4-FFF2-40B4-BE49-F238E27FC236}">
-                <a16:creationId xmlns:a16="http://schemas.microsoft.com/office/drawing/2014/main" id="{83CAF04E-2D3A-4864-9AAF-193D4385F027}"/>
+                <a16:creationId xmlns:a16="http://schemas.microsoft.com/office/drawing/2014/main" id="{8AC06110-4C47-4210-9E0F-5FFAA32C80C8}"/>
               </a:ext>
             </a:extLst>
           </p:cNvPr>
@@ -4403,7 +4403,7 @@
           <p:cNvPr id="88" name="anchor-13">
             <a:extLst xmlns:a="http://schemas.openxmlformats.org/drawingml/2006/main">
               <a:ext uri="{FF2B5EF4-FFF2-40B4-BE49-F238E27FC236}">
-                <a16:creationId xmlns:a16="http://schemas.microsoft.com/office/drawing/2014/main" id="{542DA637-3082-4001-9607-849912168A68}"/>
+                <a16:creationId xmlns:a16="http://schemas.microsoft.com/office/drawing/2014/main" id="{B46E82A5-BA43-4851-B320-429F6DF85D1C}"/>
               </a:ext>
             </a:extLst>
           </p:cNvPr>
@@ -4459,7 +4459,7 @@
           <p:cNvPr id="90" name="query-encoder-path">
             <a:extLst xmlns:a="http://schemas.openxmlformats.org/drawingml/2006/main">
               <a:ext uri="{FF2B5EF4-FFF2-40B4-BE49-F238E27FC236}">
-                <a16:creationId xmlns:a16="http://schemas.microsoft.com/office/drawing/2014/main" id="{E7ECF79F-A2E6-4B4E-8536-FB470ADCEE6A}"/>
+                <a16:creationId xmlns:a16="http://schemas.microsoft.com/office/drawing/2014/main" id="{15397776-A35A-469B-8FF3-464469B691C4}"/>
               </a:ext>
             </a:extLst>
           </p:cNvPr>
@@ -4492,7 +4492,7 @@
           <p:cNvPr id="91" name="query-path-title">
             <a:extLst xmlns:a="http://schemas.openxmlformats.org/drawingml/2006/main">
               <a:ext uri="{FF2B5EF4-FFF2-40B4-BE49-F238E27FC236}">
-                <a16:creationId xmlns:a16="http://schemas.microsoft.com/office/drawing/2014/main" id="{82B40163-5E1B-4619-B56C-0018862294F3}"/>
+                <a16:creationId xmlns:a16="http://schemas.microsoft.com/office/drawing/2014/main" id="{B1B6ABDF-BDF0-4A62-A1CF-5BD0734AC08E}"/>
               </a:ext>
             </a:extLst>
           </p:cNvPr>
@@ -4581,7 +4581,7 @@
           <p:cNvPr id="92" name="query-path-steps">
             <a:extLst xmlns:a="http://schemas.openxmlformats.org/drawingml/2006/main">
               <a:ext uri="{FF2B5EF4-FFF2-40B4-BE49-F238E27FC236}">
-                <a16:creationId xmlns:a16="http://schemas.microsoft.com/office/drawing/2014/main" id="{753F26D2-DB52-4DFD-BAEF-0D51F2D7A1CE}"/>
+                <a16:creationId xmlns:a16="http://schemas.microsoft.com/office/drawing/2014/main" id="{798EFB60-1184-4C99-B3BE-09ACDAD39230}"/>
               </a:ext>
             </a:extLst>
           </p:cNvPr>
@@ -4643,7 +4643,7 @@
           <p:cNvPr id="93" name="query-grid-0-0">
             <a:extLst xmlns:a="http://schemas.openxmlformats.org/drawingml/2006/main">
               <a:ext uri="{FF2B5EF4-FFF2-40B4-BE49-F238E27FC236}">
-                <a16:creationId xmlns:a16="http://schemas.microsoft.com/office/drawing/2014/main" id="{F3FCE6FF-4499-4ABF-87D4-E5141F87E38D}"/>
+                <a16:creationId xmlns:a16="http://schemas.microsoft.com/office/drawing/2014/main" id="{1ACF0830-ABCE-4B27-8CB4-5F6826BCB7D5}"/>
               </a:ext>
             </a:extLst>
           </p:cNvPr>
@@ -4676,7 +4676,7 @@
           <p:cNvPr id="94" name="query-grid-0-1">
             <a:extLst xmlns:a="http://schemas.openxmlformats.org/drawingml/2006/main">
               <a:ext uri="{FF2B5EF4-FFF2-40B4-BE49-F238E27FC236}">
-                <a16:creationId xmlns:a16="http://schemas.microsoft.com/office/drawing/2014/main" id="{1B90CC90-4CA2-453F-8720-8F1F30B0FF8A}"/>
+                <a16:creationId xmlns:a16="http://schemas.microsoft.com/office/drawing/2014/main" id="{AAADB515-1478-482F-876D-45867DCCFE7B}"/>
               </a:ext>
             </a:extLst>
           </p:cNvPr>
@@ -4709,7 +4709,7 @@
           <p:cNvPr id="95" name="query-grid-0-2">
             <a:extLst xmlns:a="http://schemas.openxmlformats.org/drawingml/2006/main">
               <a:ext uri="{FF2B5EF4-FFF2-40B4-BE49-F238E27FC236}">
-                <a16:creationId xmlns:a16="http://schemas.microsoft.com/office/drawing/2014/main" id="{C82B9CF2-DC2F-4C77-856F-39D61F02589A}"/>
+                <a16:creationId xmlns:a16="http://schemas.microsoft.com/office/drawing/2014/main" id="{63EAD841-0331-46C6-BCB5-9F513A3DE26A}"/>
               </a:ext>
             </a:extLst>
           </p:cNvPr>
@@ -4742,7 +4742,7 @@
           <p:cNvPr id="96" name="query-grid-0-3">
             <a:extLst xmlns:a="http://schemas.openxmlformats.org/drawingml/2006/main">
               <a:ext uri="{FF2B5EF4-FFF2-40B4-BE49-F238E27FC236}">
-                <a16:creationId xmlns:a16="http://schemas.microsoft.com/office/drawing/2014/main" id="{EA3B311D-A3D7-459A-9884-5E926CB93C6D}"/>
+                <a16:creationId xmlns:a16="http://schemas.microsoft.com/office/drawing/2014/main" id="{8043CB78-3E36-4D97-BC5B-F3851AEBB3B0}"/>
               </a:ext>
             </a:extLst>
           </p:cNvPr>
@@ -4775,7 +4775,7 @@
           <p:cNvPr id="97" name="anchor-14">
             <a:extLst xmlns:a="http://schemas.openxmlformats.org/drawingml/2006/main">
               <a:ext uri="{FF2B5EF4-FFF2-40B4-BE49-F238E27FC236}">
-                <a16:creationId xmlns:a16="http://schemas.microsoft.com/office/drawing/2014/main" id="{0DA1863D-1E12-444E-B458-110A23B16F4D}"/>
+                <a16:creationId xmlns:a16="http://schemas.microsoft.com/office/drawing/2014/main" id="{2440A4E9-8A9E-416D-ACA1-10064A5492B7}"/>
               </a:ext>
             </a:extLst>
           </p:cNvPr>
@@ -4804,7 +4804,7 @@
           <p:cNvPr id="98" name="anchor-15">
             <a:extLst xmlns:a="http://schemas.openxmlformats.org/drawingml/2006/main">
               <a:ext uri="{FF2B5EF4-FFF2-40B4-BE49-F238E27FC236}">
-                <a16:creationId xmlns:a16="http://schemas.microsoft.com/office/drawing/2014/main" id="{9D353D2A-DF80-40EE-980E-FA4A93E38B81}"/>
+                <a16:creationId xmlns:a16="http://schemas.microsoft.com/office/drawing/2014/main" id="{599BA007-3061-4E0F-BE80-8B7D6F43A1F7}"/>
               </a:ext>
             </a:extLst>
           </p:cNvPr>
@@ -4860,7 +4860,7 @@
           <p:cNvPr id="100" name="matching-box">
             <a:extLst xmlns:a="http://schemas.openxmlformats.org/drawingml/2006/main">
               <a:ext uri="{FF2B5EF4-FFF2-40B4-BE49-F238E27FC236}">
-                <a16:creationId xmlns:a16="http://schemas.microsoft.com/office/drawing/2014/main" id="{015DB8D8-35A6-45C8-80AC-914183E9BEA4}"/>
+                <a16:creationId xmlns:a16="http://schemas.microsoft.com/office/drawing/2014/main" id="{90BFB23C-4477-4696-86C1-42C52E44110F}"/>
               </a:ext>
             </a:extLst>
           </p:cNvPr>
@@ -4893,7 +4893,7 @@
           <p:cNvPr id="101" name="matching-title">
             <a:extLst xmlns:a="http://schemas.openxmlformats.org/drawingml/2006/main">
               <a:ext uri="{FF2B5EF4-FFF2-40B4-BE49-F238E27FC236}">
-                <a16:creationId xmlns:a16="http://schemas.microsoft.com/office/drawing/2014/main" id="{6A4F8EA3-F8D4-4051-B09C-B399465CFED0}"/>
+                <a16:creationId xmlns:a16="http://schemas.microsoft.com/office/drawing/2014/main" id="{8B590EB4-0945-4109-A928-BCB1303026ED}"/>
               </a:ext>
             </a:extLst>
           </p:cNvPr>
@@ -4955,7 +4955,7 @@
           <p:cNvPr id="102" name="j-background">
             <a:extLst xmlns:a="http://schemas.openxmlformats.org/drawingml/2006/main">
               <a:ext uri="{FF2B5EF4-FFF2-40B4-BE49-F238E27FC236}">
-                <a16:creationId xmlns:a16="http://schemas.microsoft.com/office/drawing/2014/main" id="{DDC88EFD-FCF9-4D3E-842C-3C807401BB2F}"/>
+                <a16:creationId xmlns:a16="http://schemas.microsoft.com/office/drawing/2014/main" id="{DBBFCB1D-189B-4964-A8ED-6D909EE48CF8}"/>
               </a:ext>
             </a:extLst>
           </p:cNvPr>
@@ -4988,7 +4988,7 @@
           <p:cNvPr id="103" name="joint-equation">
             <a:extLst xmlns:a="http://schemas.openxmlformats.org/drawingml/2006/main">
               <a:ext uri="{FF2B5EF4-FFF2-40B4-BE49-F238E27FC236}">
-                <a16:creationId xmlns:a16="http://schemas.microsoft.com/office/drawing/2014/main" id="{66804B5A-29C7-49D0-9004-2CB9344FE94F}"/>
+                <a16:creationId xmlns:a16="http://schemas.microsoft.com/office/drawing/2014/main" id="{B42FB2D3-2278-4E95-816A-7C4EE556F039}"/>
               </a:ext>
             </a:extLst>
           </p:cNvPr>
@@ -5211,7 +5211,7 @@
           <p:cNvPr id="104" name="l-background">
             <a:extLst xmlns:a="http://schemas.openxmlformats.org/drawingml/2006/main">
               <a:ext uri="{FF2B5EF4-FFF2-40B4-BE49-F238E27FC236}">
-                <a16:creationId xmlns:a16="http://schemas.microsoft.com/office/drawing/2014/main" id="{08E148B0-B103-43D2-9224-64B4214783E9}"/>
+                <a16:creationId xmlns:a16="http://schemas.microsoft.com/office/drawing/2014/main" id="{F1CE8F39-E334-43D6-B851-1DE320B53137}"/>
               </a:ext>
             </a:extLst>
           </p:cNvPr>
@@ -5244,7 +5244,7 @@
           <p:cNvPr id="105" name="independent-equation">
             <a:extLst xmlns:a="http://schemas.openxmlformats.org/drawingml/2006/main">
               <a:ext uri="{FF2B5EF4-FFF2-40B4-BE49-F238E27FC236}">
-                <a16:creationId xmlns:a16="http://schemas.microsoft.com/office/drawing/2014/main" id="{029AA725-F47B-4AEF-829F-09EF9044A1D3}"/>
+                <a16:creationId xmlns:a16="http://schemas.microsoft.com/office/drawing/2014/main" id="{53B5C03C-1002-4AF9-B947-0FFF730BBD0B}"/>
               </a:ext>
             </a:extLst>
           </p:cNvPr>
@@ -5467,7 +5467,7 @@
           <p:cNvPr id="106" name="resize-smooth">
             <a:extLst xmlns:a="http://schemas.openxmlformats.org/drawingml/2006/main">
               <a:ext uri="{FF2B5EF4-FFF2-40B4-BE49-F238E27FC236}">
-                <a16:creationId xmlns:a16="http://schemas.microsoft.com/office/drawing/2014/main" id="{C6A2B8F5-CF57-4874-A726-971A836F9BAA}"/>
+                <a16:creationId xmlns:a16="http://schemas.microsoft.com/office/drawing/2014/main" id="{E7CC626B-A5B5-4EF3-9F3D-93E1A2AD7A20}"/>
               </a:ext>
             </a:extLst>
           </p:cNvPr>
@@ -5591,7 +5591,7 @@
           <p:cNvPr id="107" name="anchor-16">
             <a:extLst xmlns:a="http://schemas.openxmlformats.org/drawingml/2006/main">
               <a:ext uri="{FF2B5EF4-FFF2-40B4-BE49-F238E27FC236}">
-                <a16:creationId xmlns:a16="http://schemas.microsoft.com/office/drawing/2014/main" id="{EF7A7828-79EE-4F60-AE36-85C83A0ED63A}"/>
+                <a16:creationId xmlns:a16="http://schemas.microsoft.com/office/drawing/2014/main" id="{07C78DE6-5C4B-4585-B640-51A5925CA61C}"/>
               </a:ext>
             </a:extLst>
           </p:cNvPr>
@@ -5620,7 +5620,7 @@
           <p:cNvPr id="108" name="anchor-17">
             <a:extLst xmlns:a="http://schemas.openxmlformats.org/drawingml/2006/main">
               <a:ext uri="{FF2B5EF4-FFF2-40B4-BE49-F238E27FC236}">
-                <a16:creationId xmlns:a16="http://schemas.microsoft.com/office/drawing/2014/main" id="{3F26ACB0-8C64-464E-8421-B17EE04ACFFC}"/>
+                <a16:creationId xmlns:a16="http://schemas.microsoft.com/office/drawing/2014/main" id="{F7B691B9-4698-4AE2-8746-90DE8B1C2DCC}"/>
               </a:ext>
             </a:extLst>
           </p:cNvPr>
@@ -5676,7 +5676,7 @@
           <p:cNvPr id="110" name="anchor-18">
             <a:extLst xmlns:a="http://schemas.openxmlformats.org/drawingml/2006/main">
               <a:ext uri="{FF2B5EF4-FFF2-40B4-BE49-F238E27FC236}">
-                <a16:creationId xmlns:a16="http://schemas.microsoft.com/office/drawing/2014/main" id="{22D2B4F8-983A-41EA-95E1-FA2C0AE99131}"/>
+                <a16:creationId xmlns:a16="http://schemas.microsoft.com/office/drawing/2014/main" id="{DC66BFF0-8D9C-4BBE-83BE-032184C0A96D}"/>
               </a:ext>
             </a:extLst>
           </p:cNvPr>
@@ -5705,7 +5705,7 @@
           <p:cNvPr id="111" name="anchor-19">
             <a:extLst xmlns:a="http://schemas.openxmlformats.org/drawingml/2006/main">
               <a:ext uri="{FF2B5EF4-FFF2-40B4-BE49-F238E27FC236}">
-                <a16:creationId xmlns:a16="http://schemas.microsoft.com/office/drawing/2014/main" id="{096619AE-99BE-4FFB-A8C2-4AEB649E8883}"/>
+                <a16:creationId xmlns:a16="http://schemas.microsoft.com/office/drawing/2014/main" id="{7071E179-9511-4406-AEA0-1732EB93168F}"/>
               </a:ext>
             </a:extLst>
           </p:cNvPr>
@@ -5761,7 +5761,7 @@
           <p:cNvPr id="113" name="matching-explanation">
             <a:extLst xmlns:a="http://schemas.openxmlformats.org/drawingml/2006/main">
               <a:ext uri="{FF2B5EF4-FFF2-40B4-BE49-F238E27FC236}">
-                <a16:creationId xmlns:a16="http://schemas.microsoft.com/office/drawing/2014/main" id="{5041AEC5-EFEA-42DB-B69D-69CDED8BA7D9}"/>
+                <a16:creationId xmlns:a16="http://schemas.microsoft.com/office/drawing/2014/main" id="{B867EAFD-4F5C-497B-AC35-576816D1CEF7}"/>
               </a:ext>
             </a:extLst>
           </p:cNvPr>
@@ -5813,7 +5813,7 @@
                 <a:ea typeface="Times New Roman"/>
                 <a:cs typeface="Times New Roman"/>
               </a:rPr>
-              <a:t>J  one shared row</a:t>
+              <a:t>Joint: one shared row</a:t>
             </a:r>
           </a:p>
           <a:p xmlns:a="http://schemas.openxmlformats.org/drawingml/2006/main">
@@ -5840,7 +5840,7 @@
                 <a:ea typeface="Times New Roman"/>
                 <a:cs typeface="Times New Roman"/>
               </a:rPr>
-              <a:t>L  one row per branch</a:t>
+              <a:t>Independent: separate rows</a:t>
             </a:r>
           </a:p>
         </p:txBody>
@@ -5850,7 +5850,7 @@
           <p:cNvPr id="114" name="outputs-box">
             <a:extLst xmlns:a="http://schemas.openxmlformats.org/drawingml/2006/main">
               <a:ext uri="{FF2B5EF4-FFF2-40B4-BE49-F238E27FC236}">
-                <a16:creationId xmlns:a16="http://schemas.microsoft.com/office/drawing/2014/main" id="{503ED287-5123-4EA0-B220-552A7116BF52}"/>
+                <a16:creationId xmlns:a16="http://schemas.microsoft.com/office/drawing/2014/main" id="{51EE25DB-A87A-43FA-87B7-1B95D55843F0}"/>
               </a:ext>
             </a:extLst>
           </p:cNvPr>
@@ -5883,7 +5883,7 @@
           <p:cNvPr id="115" name="output-heading">
             <a:extLst xmlns:a="http://schemas.openxmlformats.org/drawingml/2006/main">
               <a:ext uri="{FF2B5EF4-FFF2-40B4-BE49-F238E27FC236}">
-                <a16:creationId xmlns:a16="http://schemas.microsoft.com/office/drawing/2014/main" id="{AC2AC99A-5EEE-4DA8-AD17-ECA601FC3DF1}"/>
+                <a16:creationId xmlns:a16="http://schemas.microsoft.com/office/drawing/2014/main" id="{E6F0132C-EFE3-4731-80D4-CEBAEA4A7AA4}"/>
               </a:ext>
             </a:extLst>
           </p:cNvPr>
@@ -5949,7 +5949,7 @@
           <p:nvPr/>
         </p:nvPicPr>
         <p:blipFill>
-          <a:blip xmlns:r="http://schemas.openxmlformats.org/officeDocument/2006/relationships" xmlns:a="http://schemas.openxmlformats.org/drawingml/2006/main" r:embed="R7b021c6e70d94ac2"/>
+          <a:blip xmlns:r="http://schemas.openxmlformats.org/officeDocument/2006/relationships" xmlns:a="http://schemas.openxmlformats.org/drawingml/2006/main" r:embed="R9312dc7cc8b848ff"/>
           <a:stretch xmlns:a="http://schemas.openxmlformats.org/drawingml/2006/main"/>
         </p:blipFill>
         <p:spPr>
@@ -5967,7 +5967,7 @@
           <p:cNvPr id="117" name="map-frame">
             <a:extLst xmlns:a="http://schemas.openxmlformats.org/drawingml/2006/main">
               <a:ext uri="{FF2B5EF4-FFF2-40B4-BE49-F238E27FC236}">
-                <a16:creationId xmlns:a16="http://schemas.microsoft.com/office/drawing/2014/main" id="{5E20C743-90EB-43F6-9553-ADD9668BABCA}"/>
+                <a16:creationId xmlns:a16="http://schemas.microsoft.com/office/drawing/2014/main" id="{B04F50B8-9ED0-408E-BAB4-A48E231F0F47}"/>
               </a:ext>
             </a:extLst>
           </p:cNvPr>
@@ -6002,7 +6002,7 @@
           <p:nvPr/>
         </p:nvPicPr>
         <p:blipFill>
-          <a:blip xmlns:r="http://schemas.openxmlformats.org/officeDocument/2006/relationships" xmlns:a="http://schemas.openxmlformats.org/drawingml/2006/main" r:embed="Rc27444f024f84aff"/>
+          <a:blip xmlns:r="http://schemas.openxmlformats.org/officeDocument/2006/relationships" xmlns:a="http://schemas.openxmlformats.org/drawingml/2006/main" r:embed="R6332d0510af6457d"/>
           <a:srcRect xmlns:a="http://schemas.openxmlformats.org/drawingml/2006/main" l="0" t="0" r="0" b="0"/>
           <a:stretch xmlns:a="http://schemas.openxmlformats.org/drawingml/2006/main">
             <a:fillRect l="0" t="0" r="0" b="0"/>
@@ -6023,7 +6023,7 @@
           <p:cNvPr id="119" name="threshold-display-contour">
             <a:extLst xmlns:a="http://schemas.openxmlformats.org/drawingml/2006/main">
               <a:ext uri="{FF2B5EF4-FFF2-40B4-BE49-F238E27FC236}">
-                <a16:creationId xmlns:a16="http://schemas.microsoft.com/office/drawing/2014/main" id="{CD619E44-B138-4CE8-9072-F9E90D5DDC48}"/>
+                <a16:creationId xmlns:a16="http://schemas.microsoft.com/office/drawing/2014/main" id="{1F7FBC37-0149-4932-A4D4-5638160C410E}"/>
               </a:ext>
             </a:extLst>
           </p:cNvPr>
@@ -10530,7 +10530,7 @@
           <p:cNvPr id="120" name="contour-frame">
             <a:extLst xmlns:a="http://schemas.openxmlformats.org/drawingml/2006/main">
               <a:ext uri="{FF2B5EF4-FFF2-40B4-BE49-F238E27FC236}">
-                <a16:creationId xmlns:a16="http://schemas.microsoft.com/office/drawing/2014/main" id="{2C2F4FBB-8B8A-49E0-828E-FD921A82DD61}"/>
+                <a16:creationId xmlns:a16="http://schemas.microsoft.com/office/drawing/2014/main" id="{F6B1DD0A-941B-4D2C-B2CB-89D6E7845EDE}"/>
               </a:ext>
             </a:extLst>
           </p:cNvPr>
@@ -10561,7 +10561,7 @@
           <p:cNvPr id="121" name="map-label">
             <a:extLst xmlns:a="http://schemas.openxmlformats.org/drawingml/2006/main">
               <a:ext uri="{FF2B5EF4-FFF2-40B4-BE49-F238E27FC236}">
-                <a16:creationId xmlns:a16="http://schemas.microsoft.com/office/drawing/2014/main" id="{820941F6-7406-480E-A6A3-148B119D5CBD}"/>
+                <a16:creationId xmlns:a16="http://schemas.microsoft.com/office/drawing/2014/main" id="{5642FD0B-A143-4036-9E54-FE0082E125A8}"/>
               </a:ext>
             </a:extLst>
           </p:cNvPr>
@@ -10630,7 +10630,7 @@
           <p:cNvPr id="122" name="display-label">
             <a:extLst xmlns:a="http://schemas.openxmlformats.org/drawingml/2006/main">
               <a:ext uri="{FF2B5EF4-FFF2-40B4-BE49-F238E27FC236}">
-                <a16:creationId xmlns:a16="http://schemas.microsoft.com/office/drawing/2014/main" id="{87745D48-8B60-4532-AF1E-715173CBED5D}"/>
+                <a16:creationId xmlns:a16="http://schemas.microsoft.com/office/drawing/2014/main" id="{B3D200B0-3948-419D-A267-FACB3881B434}"/>
               </a:ext>
             </a:extLst>
           </p:cNvPr>
@@ -10692,7 +10692,7 @@
           <p:cNvPr id="123" name="image-score">
             <a:extLst xmlns:a="http://schemas.openxmlformats.org/drawingml/2006/main">
               <a:ext uri="{FF2B5EF4-FFF2-40B4-BE49-F238E27FC236}">
-                <a16:creationId xmlns:a16="http://schemas.microsoft.com/office/drawing/2014/main" id="{0E4C4225-17D7-408C-BC0D-39F49DA78027}"/>
+                <a16:creationId xmlns:a16="http://schemas.microsoft.com/office/drawing/2014/main" id="{67FA6EFC-E6BD-48CD-B7C7-02D168F54717}"/>
               </a:ext>
             </a:extLst>
           </p:cNvPr>
@@ -10816,7 +10816,7 @@
           <p:cNvPr id="124" name="display-only">
             <a:extLst xmlns:a="http://schemas.openxmlformats.org/drawingml/2006/main">
               <a:ext uri="{FF2B5EF4-FFF2-40B4-BE49-F238E27FC236}">
-                <a16:creationId xmlns:a16="http://schemas.microsoft.com/office/drawing/2014/main" id="{E4AB91A5-69C8-489A-9CA3-DB324CBECB0F}"/>
+                <a16:creationId xmlns:a16="http://schemas.microsoft.com/office/drawing/2014/main" id="{58DE0BEC-990C-499D-8397-62150319BD83}"/>
               </a:ext>
             </a:extLst>
           </p:cNvPr>
@@ -10907,7 +10907,7 @@
           <p:cNvPr id="125" name="section-c">
             <a:extLst xmlns:a="http://schemas.openxmlformats.org/drawingml/2006/main">
               <a:ext uri="{FF2B5EF4-FFF2-40B4-BE49-F238E27FC236}">
-                <a16:creationId xmlns:a16="http://schemas.microsoft.com/office/drawing/2014/main" id="{ECC3D7AC-DFF1-4E72-BDD9-C966CCED9225}"/>
+                <a16:creationId xmlns:a16="http://schemas.microsoft.com/office/drawing/2014/main" id="{77B69DE0-5180-4C98-BB9F-D0021FA6F8F8}"/>
               </a:ext>
             </a:extLst>
           </p:cNvPr>
@@ -10969,7 +10969,7 @@
           <p:cNvPr id="126" name="control-label-0">
             <a:extLst xmlns:a="http://schemas.openxmlformats.org/drawingml/2006/main">
               <a:ext uri="{FF2B5EF4-FFF2-40B4-BE49-F238E27FC236}">
-                <a16:creationId xmlns:a16="http://schemas.microsoft.com/office/drawing/2014/main" id="{9CEAFA1B-25A5-4722-A733-80C27B50BAE4}"/>
+                <a16:creationId xmlns:a16="http://schemas.microsoft.com/office/drawing/2014/main" id="{7FA0866C-8E28-4330-A35D-1E8170BED696}"/>
               </a:ext>
             </a:extLst>
           </p:cNvPr>
@@ -11058,7 +11058,7 @@
           <p:cNvPr id="127" name="control-weights-0">
             <a:extLst xmlns:a="http://schemas.openxmlformats.org/drawingml/2006/main">
               <a:ext uri="{FF2B5EF4-FFF2-40B4-BE49-F238E27FC236}">
-                <a16:creationId xmlns:a16="http://schemas.microsoft.com/office/drawing/2014/main" id="{77ABCA7D-E597-438B-94A0-6C9F8C61DF5C}"/>
+                <a16:creationId xmlns:a16="http://schemas.microsoft.com/office/drawing/2014/main" id="{0F8D62B2-6138-4944-BD15-9F9862E64593}"/>
               </a:ext>
             </a:extLst>
           </p:cNvPr>
@@ -11120,7 +11120,7 @@
           <p:cNvPr id="128" name="control-label-1">
             <a:extLst xmlns:a="http://schemas.openxmlformats.org/drawingml/2006/main">
               <a:ext uri="{FF2B5EF4-FFF2-40B4-BE49-F238E27FC236}">
-                <a16:creationId xmlns:a16="http://schemas.microsoft.com/office/drawing/2014/main" id="{94925914-B4BD-4CF6-B5D5-8F0ECF171C8A}"/>
+                <a16:creationId xmlns:a16="http://schemas.microsoft.com/office/drawing/2014/main" id="{E650E094-6599-4C02-A07B-076A5F0ACB9D}"/>
               </a:ext>
             </a:extLst>
           </p:cNvPr>
@@ -11209,7 +11209,7 @@
           <p:cNvPr id="129" name="control-weights-1">
             <a:extLst xmlns:a="http://schemas.openxmlformats.org/drawingml/2006/main">
               <a:ext uri="{FF2B5EF4-FFF2-40B4-BE49-F238E27FC236}">
-                <a16:creationId xmlns:a16="http://schemas.microsoft.com/office/drawing/2014/main" id="{B3DCE95C-065B-45A8-82DE-9D06750DE965}"/>
+                <a16:creationId xmlns:a16="http://schemas.microsoft.com/office/drawing/2014/main" id="{538D7AE7-41B2-43FF-8D9B-3DF8329FA548}"/>
               </a:ext>
             </a:extLst>
           </p:cNvPr>
@@ -11261,7 +11261,7 @@
                 <a:ea typeface="Times New Roman"/>
                 <a:cs typeface="Times New Roman"/>
               </a:rPr>
-              <a:t>Duplicate existing features</a:t>
+              <a:t>Copy existing features</a:t>
             </a:r>
           </a:p>
         </p:txBody>
@@ -11271,7 +11271,7 @@
           <p:cNvPr id="130" name="control-label-2">
             <a:extLst xmlns:a="http://schemas.openxmlformats.org/drawingml/2006/main">
               <a:ext uri="{FF2B5EF4-FFF2-40B4-BE49-F238E27FC236}">
-                <a16:creationId xmlns:a16="http://schemas.microsoft.com/office/drawing/2014/main" id="{8A5C11CB-16FD-4D17-A892-7270BB19D980}"/>
+                <a16:creationId xmlns:a16="http://schemas.microsoft.com/office/drawing/2014/main" id="{418D9C33-9617-4BFE-9EF2-A6A32A71ECAB}"/>
               </a:ext>
             </a:extLst>
           </p:cNvPr>
@@ -11360,7 +11360,7 @@
           <p:cNvPr id="131" name="control-weights-2">
             <a:extLst xmlns:a="http://schemas.openxmlformats.org/drawingml/2006/main">
               <a:ext uri="{FF2B5EF4-FFF2-40B4-BE49-F238E27FC236}">
-                <a16:creationId xmlns:a16="http://schemas.microsoft.com/office/drawing/2014/main" id="{BC9FD3DC-6B85-41C4-8154-6AD4AC5DDCD7}"/>
+                <a16:creationId xmlns:a16="http://schemas.microsoft.com/office/drawing/2014/main" id="{3F7E44D4-15D4-464D-91A9-985A7EB29A78}"/>
               </a:ext>
             </a:extLst>
           </p:cNvPr>
@@ -11422,7 +11422,7 @@
           <p:cNvPr id="132" name="control-label-3">
             <a:extLst xmlns:a="http://schemas.openxmlformats.org/drawingml/2006/main">
               <a:ext uri="{FF2B5EF4-FFF2-40B4-BE49-F238E27FC236}">
-                <a16:creationId xmlns:a16="http://schemas.microsoft.com/office/drawing/2014/main" id="{E2621EEF-7939-4B3D-9AC4-2C33927FA510}"/>
+                <a16:creationId xmlns:a16="http://schemas.microsoft.com/office/drawing/2014/main" id="{BFDBD167-DCF2-456A-BC9D-1D99902ED506}"/>
               </a:ext>
             </a:extLst>
           </p:cNvPr>
@@ -11511,7 +11511,7 @@
           <p:cNvPr id="133" name="control-weights-3">
             <a:extLst xmlns:a="http://schemas.openxmlformats.org/drawingml/2006/main">
               <a:ext uri="{FF2B5EF4-FFF2-40B4-BE49-F238E27FC236}">
-                <a16:creationId xmlns:a16="http://schemas.microsoft.com/office/drawing/2014/main" id="{7E2F94C2-95BF-4920-A322-2015306BF1D4}"/>
+                <a16:creationId xmlns:a16="http://schemas.microsoft.com/office/drawing/2014/main" id="{69630CE9-AFBE-41B5-B2C6-A12ACB0A3528}"/>
               </a:ext>
             </a:extLst>
           </p:cNvPr>
@@ -11573,7 +11573,7 @@
           <p:cNvPr id="134" name="tri-effect">
             <a:extLst xmlns:a="http://schemas.openxmlformats.org/drawingml/2006/main">
               <a:ext uri="{FF2B5EF4-FFF2-40B4-BE49-F238E27FC236}">
-                <a16:creationId xmlns:a16="http://schemas.microsoft.com/office/drawing/2014/main" id="{70AF9123-6EB3-49DD-AE56-DFD2A06BEC38}"/>
+                <a16:creationId xmlns:a16="http://schemas.microsoft.com/office/drawing/2014/main" id="{7970C9E9-7F0A-4683-A185-E8A3F33ED70C}"/>
               </a:ext>
             </a:extLst>
           </p:cNvPr>
@@ -11796,7 +11796,7 @@
           <p:cNvPr id="135" name="bal-effect">
             <a:extLst xmlns:a="http://schemas.openxmlformats.org/drawingml/2006/main">
               <a:ext uri="{FF2B5EF4-FFF2-40B4-BE49-F238E27FC236}">
-                <a16:creationId xmlns:a16="http://schemas.microsoft.com/office/drawing/2014/main" id="{5A3467F1-511C-4B0A-88CB-6771F8E3C1EE}"/>
+                <a16:creationId xmlns:a16="http://schemas.microsoft.com/office/drawing/2014/main" id="{178E86DB-A593-4465-AE91-C2782B8C1A16}"/>
               </a:ext>
             </a:extLst>
           </p:cNvPr>
@@ -12019,7 +12019,7 @@
           <p:cNvPr id="136" name="tri-interaction">
             <a:extLst xmlns:a="http://schemas.openxmlformats.org/drawingml/2006/main">
               <a:ext uri="{FF2B5EF4-FFF2-40B4-BE49-F238E27FC236}">
-                <a16:creationId xmlns:a16="http://schemas.microsoft.com/office/drawing/2014/main" id="{A458C8B0-4BDB-46CF-B54A-83119335954E}"/>
+                <a16:creationId xmlns:a16="http://schemas.microsoft.com/office/drawing/2014/main" id="{ECB36DE9-D17E-48EB-B74B-73B76D47998B}"/>
               </a:ext>
             </a:extLst>
           </p:cNvPr>
@@ -12198,7 +12198,7 @@
           <p:cNvPr id="137" name="bal-interaction">
             <a:extLst xmlns:a="http://schemas.openxmlformats.org/drawingml/2006/main">
               <a:ext uri="{FF2B5EF4-FFF2-40B4-BE49-F238E27FC236}">
-                <a16:creationId xmlns:a16="http://schemas.microsoft.com/office/drawing/2014/main" id="{3FEC39B1-16F9-4678-8EB6-90ADB21C8CE9}"/>
+                <a16:creationId xmlns:a16="http://schemas.microsoft.com/office/drawing/2014/main" id="{3A5D6382-74ED-442B-BA86-6E9BC5F0E000}"/>
               </a:ext>
             </a:extLst>
           </p:cNvPr>
@@ -12377,7 +12377,7 @@
           <p:cNvPr id="138" name="matched-condition-note">
             <a:extLst xmlns:a="http://schemas.openxmlformats.org/drawingml/2006/main">
               <a:ext uri="{FF2B5EF4-FFF2-40B4-BE49-F238E27FC236}">
-                <a16:creationId xmlns:a16="http://schemas.microsoft.com/office/drawing/2014/main" id="{036B485C-6717-4524-8A4B-78F840ED5C75}"/>
+                <a16:creationId xmlns:a16="http://schemas.microsoft.com/office/drawing/2014/main" id="{F2DBF32F-06CB-412B-98D8-990D5F8BC6C8}"/>
               </a:ext>
             </a:extLst>
           </p:cNvPr>
@@ -12437,7 +12437,7 @@
     </p:spTree>
     <p:extLst>
       <p:ext uri="{BB962C8B-B14F-4D97-AF65-F5344CB8AC3E}">
-        <p14:creationId xmlns:p14="http://schemas.microsoft.com/office/powerpoint/2010/main" val="1265793833"/>
+        <p14:creationId xmlns:p14="http://schemas.microsoft.com/office/powerpoint/2010/main" val="1601246663"/>
       </p:ext>
     </p:extLst>
   </p:cSld>
